--- a/sr_pred_eval.pptx
+++ b/sr_pred_eval.pptx
@@ -9,10 +9,13 @@
     <p:sldId id="262" r:id="rId4"/>
     <p:sldId id="261" r:id="rId5"/>
     <p:sldId id="256" r:id="rId6"/>
-    <p:sldId id="257" r:id="rId7"/>
-    <p:sldId id="260" r:id="rId8"/>
-    <p:sldId id="258" r:id="rId9"/>
-    <p:sldId id="259" r:id="rId10"/>
+    <p:sldId id="266" r:id="rId7"/>
+    <p:sldId id="257" r:id="rId8"/>
+    <p:sldId id="260" r:id="rId9"/>
+    <p:sldId id="264" r:id="rId10"/>
+    <p:sldId id="265" r:id="rId11"/>
+    <p:sldId id="258" r:id="rId12"/>
+    <p:sldId id="259" r:id="rId13"/>
   </p:sldIdLst>
   <p:sldSz cx="12192000" cy="6858000"/>
   <p:notesSz cx="6858000" cy="9144000"/>
@@ -2967,24 +2970,258 @@
           </a:p>
         </p:txBody>
       </p:sp>
-      <p:sp>
-        <p:nvSpPr>
-          <p:cNvPr id="3" name="Content Placeholder 2"/>
-          <p:cNvSpPr>
-            <a:spLocks noGrp="1"/>
-          </p:cNvSpPr>
+      <p:pic>
+        <p:nvPicPr>
+          <p:cNvPr id="4" name="Content Placeholder 3"/>
+          <p:cNvPicPr>
+            <a:picLocks noChangeAspect="1"/>
+          </p:cNvPicPr>
           <p:nvPr>
             <p:ph idx="1"/>
           </p:nvPr>
-        </p:nvSpPr>
-        <p:spPr/>
-        <p:txBody>
-          <a:bodyPr/>
-          <a:p>
-            <a:endParaRPr lang="en-US"/>
-          </a:p>
-        </p:txBody>
-      </p:sp>
+        </p:nvPicPr>
+        <p:blipFill>
+          <a:blip r:embed="rId1"/>
+          <a:stretch>
+            <a:fillRect/>
+          </a:stretch>
+        </p:blipFill>
+        <p:spPr>
+          <a:xfrm>
+            <a:off x="7167245" y="1043305"/>
+            <a:ext cx="4485640" cy="4351655"/>
+          </a:xfrm>
+          <a:prstGeom prst="rect">
+            <a:avLst/>
+          </a:prstGeom>
+        </p:spPr>
+      </p:pic>
+      <p:sp>
+        <p:nvSpPr>
+          <p:cNvPr id="5" name="Text Box 4"/>
+          <p:cNvSpPr txBox="1"/>
+          <p:nvPr/>
+        </p:nvSpPr>
+        <p:spPr>
+          <a:xfrm>
+            <a:off x="692785" y="2100580"/>
+            <a:ext cx="5969635" cy="2584450"/>
+          </a:xfrm>
+          <a:prstGeom prst="rect">
+            <a:avLst/>
+          </a:prstGeom>
+          <a:noFill/>
+        </p:spPr>
+        <p:txBody>
+          <a:bodyPr wrap="square" rtlCol="0">
+            <a:spAutoFit/>
+          </a:bodyPr>
+          <a:p>
+            <a:r>
+              <a:rPr lang="en-US"/>
+              <a:t>1. Data Input: </a:t>
+            </a:r>
+            <a:endParaRPr lang="en-US"/>
+          </a:p>
+          <a:p>
+            <a:endParaRPr lang="en-US"/>
+          </a:p>
+          <a:p>
+            <a:r>
+              <a:rPr lang="zh-CN" altLang="en-US"/>
+              <a:t>体现模型的输入、</a:t>
+            </a:r>
+            <a:r>
+              <a:rPr lang="zh-CN" altLang="en-US"/>
+              <a:t>应用</a:t>
+            </a:r>
+            <a:endParaRPr lang="zh-CN" altLang="en-US"/>
+          </a:p>
+          <a:p>
+            <a:endParaRPr lang="zh-CN" altLang="en-US"/>
+          </a:p>
+          <a:p>
+            <a:r>
+              <a:rPr lang="en-US" altLang="zh-CN"/>
+              <a:t>2. Weighted Contrastive Loss </a:t>
+            </a:r>
+            <a:r>
+              <a:rPr lang="zh-CN" altLang="en-US"/>
+              <a:t>修改：</a:t>
+            </a:r>
+            <a:endParaRPr lang="zh-CN" altLang="en-US"/>
+          </a:p>
+          <a:p>
+            <a:endParaRPr lang="zh-CN" altLang="en-US"/>
+          </a:p>
+          <a:p>
+            <a:r>
+              <a:rPr lang="en-US" altLang="zh-CN"/>
+              <a:t>- heatmap </a:t>
+            </a:r>
+            <a:r>
+              <a:rPr lang="zh-CN" altLang="en-US"/>
+              <a:t>体现</a:t>
+            </a:r>
+            <a:r>
+              <a:rPr lang="en-US" altLang="zh-CN"/>
+              <a:t> cell cluster </a:t>
+            </a:r>
+            <a:r>
+              <a:rPr lang="zh-CN" altLang="en-US"/>
+              <a:t>结构</a:t>
+            </a:r>
+            <a:endParaRPr lang="zh-CN" altLang="en-US"/>
+          </a:p>
+          <a:p>
+            <a:r>
+              <a:rPr lang="en-US" altLang="zh-CN"/>
+              <a:t>- </a:t>
+            </a:r>
+            <a:r>
+              <a:rPr lang="zh-CN" altLang="en-US"/>
+              <a:t>示意图中增加和</a:t>
+            </a:r>
+            <a:r>
+              <a:rPr lang="en-US" altLang="zh-CN"/>
+              <a:t>ori clip </a:t>
+            </a:r>
+            <a:r>
+              <a:rPr lang="zh-CN" altLang="en-US"/>
+              <a:t>的</a:t>
+            </a:r>
+            <a:r>
+              <a:rPr lang="zh-CN" altLang="en-US"/>
+              <a:t>对比</a:t>
+            </a:r>
+            <a:endParaRPr lang="zh-CN" altLang="en-US"/>
+          </a:p>
+          <a:p>
+            <a:endParaRPr lang="zh-CN" altLang="en-US"/>
+          </a:p>
+        </p:txBody>
+      </p:sp>
+    </p:spTree>
+  </p:cSld>
+  <p:clrMapOvr>
+    <a:masterClrMapping/>
+  </p:clrMapOvr>
+</p:sld>
+</file>
+
+<file path=ppt/slides/slide10.xml><?xml version="1.0" encoding="utf-8"?>
+<p:sld xmlns:a="http://schemas.openxmlformats.org/drawingml/2006/main" xmlns:r="http://schemas.openxmlformats.org/officeDocument/2006/relationships" xmlns:p="http://schemas.openxmlformats.org/presentationml/2006/main">
+  <p:cSld>
+    <p:spTree>
+      <p:nvGrpSpPr>
+        <p:cNvPr id="1" name=""/>
+        <p:cNvGrpSpPr/>
+        <p:nvPr/>
+      </p:nvGrpSpPr>
+      <p:grpSpPr/>
+    </p:spTree>
+  </p:cSld>
+  <p:clrMapOvr>
+    <a:masterClrMapping/>
+  </p:clrMapOvr>
+</p:sld>
+</file>
+
+<file path=ppt/slides/slide11.xml><?xml version="1.0" encoding="utf-8"?>
+<p:sld xmlns:a="http://schemas.openxmlformats.org/drawingml/2006/main" xmlns:r="http://schemas.openxmlformats.org/officeDocument/2006/relationships" xmlns:p="http://schemas.openxmlformats.org/presentationml/2006/main">
+  <p:cSld>
+    <p:spTree>
+      <p:nvGrpSpPr>
+        <p:cNvPr id="1" name=""/>
+        <p:cNvGrpSpPr/>
+        <p:nvPr/>
+      </p:nvGrpSpPr>
+      <p:grpSpPr/>
+      <p:pic>
+        <p:nvPicPr>
+          <p:cNvPr id="4" name="Picture 3"/>
+          <p:cNvPicPr>
+            <a:picLocks noChangeAspect="1"/>
+          </p:cNvPicPr>
+          <p:nvPr/>
+        </p:nvPicPr>
+        <p:blipFill>
+          <a:blip r:embed="rId1"/>
+          <a:stretch>
+            <a:fillRect/>
+          </a:stretch>
+        </p:blipFill>
+        <p:spPr>
+          <a:xfrm>
+            <a:off x="68580" y="3819525"/>
+            <a:ext cx="9934575" cy="2850515"/>
+          </a:xfrm>
+          <a:prstGeom prst="rect">
+            <a:avLst/>
+          </a:prstGeom>
+        </p:spPr>
+      </p:pic>
+      <p:sp>
+        <p:nvSpPr>
+          <p:cNvPr id="5" name="Text Box 4"/>
+          <p:cNvSpPr txBox="1"/>
+          <p:nvPr/>
+        </p:nvSpPr>
+        <p:spPr>
+          <a:xfrm>
+            <a:off x="607695" y="454025"/>
+            <a:ext cx="4279900" cy="368300"/>
+          </a:xfrm>
+          <a:prstGeom prst="rect">
+            <a:avLst/>
+          </a:prstGeom>
+          <a:noFill/>
+        </p:spPr>
+        <p:txBody>
+          <a:bodyPr wrap="square" rtlCol="0">
+            <a:spAutoFit/>
+          </a:bodyPr>
+          <a:p>
+            <a:r>
+              <a:rPr lang="en-US"/>
+              <a:t>BMMC </a:t>
+            </a:r>
+            <a:r>
+              <a:rPr lang="zh-CN" altLang="en-US"/>
+              <a:t>数据</a:t>
+            </a:r>
+            <a:r>
+              <a:rPr lang="zh-CN" altLang="en-US"/>
+              <a:t>展示</a:t>
+            </a:r>
+            <a:endParaRPr lang="zh-CN" altLang="en-US"/>
+          </a:p>
+        </p:txBody>
+      </p:sp>
+      <p:pic>
+        <p:nvPicPr>
+          <p:cNvPr id="6" name="Picture 5"/>
+          <p:cNvPicPr>
+            <a:picLocks noChangeAspect="1"/>
+          </p:cNvPicPr>
+          <p:nvPr/>
+        </p:nvPicPr>
+        <p:blipFill>
+          <a:blip r:embed="rId2"/>
+          <a:stretch>
+            <a:fillRect/>
+          </a:stretch>
+        </p:blipFill>
+        <p:spPr>
+          <a:xfrm>
+            <a:off x="8164195" y="0"/>
+            <a:ext cx="3961130" cy="3308350"/>
+          </a:xfrm>
+          <a:prstGeom prst="rect">
+            <a:avLst/>
+          </a:prstGeom>
+        </p:spPr>
+      </p:pic>
     </p:spTree>
   </p:cSld>
   <p:clrMapOvr>
@@ -3057,7 +3294,263 @@
         <p:txBody>
           <a:bodyPr/>
           <a:p>
-            <a:endParaRPr lang="en-US"/>
+            <a:r>
+              <a:rPr lang="en-US" altLang="zh-CN"/>
+              <a:t>a. </a:t>
+            </a:r>
+            <a:r>
+              <a:rPr lang="zh-CN" altLang="en-US"/>
+              <a:t>展示</a:t>
+            </a:r>
+            <a:r>
+              <a:rPr lang="en-US" altLang="zh-CN"/>
+              <a:t>SR</a:t>
+            </a:r>
+            <a:r>
+              <a:rPr lang="zh-CN" altLang="en-US"/>
+              <a:t>在</a:t>
+            </a:r>
+            <a:r>
+              <a:rPr lang="en-US" altLang="zh-CN"/>
+              <a:t>unpaired </a:t>
+            </a:r>
+            <a:r>
+              <a:rPr lang="zh-CN" altLang="en-US"/>
+              <a:t>数据上匹配不同模态的</a:t>
+            </a:r>
+            <a:r>
+              <a:rPr lang="zh-CN" altLang="en-US"/>
+              <a:t>表现</a:t>
+            </a:r>
+            <a:endParaRPr lang="zh-CN" altLang="en-US"/>
+          </a:p>
+          <a:p>
+            <a:pPr lvl="1"/>
+            <a:r>
+              <a:rPr lang="en-US" altLang="zh-CN"/>
+              <a:t>barplot </a:t>
+            </a:r>
+            <a:r>
+              <a:rPr lang="zh-CN" altLang="en-US"/>
+              <a:t>展示和对比方法在</a:t>
+            </a:r>
+            <a:r>
+              <a:rPr lang="en-US" altLang="zh-CN"/>
+              <a:t>top-k hit </a:t>
+            </a:r>
+            <a:r>
+              <a:rPr lang="zh-CN" altLang="en-US"/>
+              <a:t>和</a:t>
+            </a:r>
+            <a:r>
+              <a:rPr lang="en-US" altLang="zh-CN"/>
+              <a:t> foscttm </a:t>
+            </a:r>
+            <a:r>
+              <a:rPr lang="zh-CN" altLang="en-US"/>
+              <a:t>指标上的</a:t>
+            </a:r>
+            <a:r>
+              <a:rPr lang="zh-CN" altLang="en-US"/>
+              <a:t>表现</a:t>
+            </a:r>
+            <a:endParaRPr lang="zh-CN" altLang="en-US"/>
+          </a:p>
+          <a:p>
+            <a:pPr lvl="1"/>
+            <a:r>
+              <a:rPr lang="zh-CN" altLang="en-US"/>
+              <a:t>直接</a:t>
+            </a:r>
+            <a:r>
+              <a:rPr lang="en-US" altLang="zh-CN"/>
+              <a:t>UMAP </a:t>
+            </a:r>
+            <a:r>
+              <a:rPr lang="zh-CN" altLang="en-US"/>
+              <a:t>展示对齐</a:t>
+            </a:r>
+            <a:r>
+              <a:rPr lang="zh-CN" altLang="en-US"/>
+              <a:t>效果</a:t>
+            </a:r>
+            <a:endParaRPr lang="zh-CN" altLang="en-US"/>
+          </a:p>
+          <a:p>
+            <a:pPr lvl="0"/>
+            <a:r>
+              <a:rPr lang="en-US" altLang="zh-CN"/>
+              <a:t>b. </a:t>
+            </a:r>
+            <a:r>
+              <a:rPr lang="zh-CN" altLang="en-US"/>
+              <a:t>展示</a:t>
+            </a:r>
+            <a:r>
+              <a:rPr lang="en-US" altLang="zh-CN"/>
+              <a:t>SR </a:t>
+            </a:r>
+            <a:r>
+              <a:rPr lang="zh-CN" altLang="en-US"/>
+              <a:t>在</a:t>
+            </a:r>
+            <a:r>
+              <a:rPr lang="en-US" altLang="zh-CN"/>
+              <a:t>multi omic </a:t>
+            </a:r>
+            <a:r>
+              <a:rPr lang="zh-CN" altLang="en-US"/>
+              <a:t>数据上整合不同模态的</a:t>
+            </a:r>
+            <a:r>
+              <a:rPr lang="zh-CN" altLang="en-US"/>
+              <a:t>表现</a:t>
+            </a:r>
+            <a:endParaRPr lang="zh-CN" altLang="en-US"/>
+          </a:p>
+          <a:p>
+            <a:pPr lvl="1"/>
+            <a:r>
+              <a:rPr lang="en-US" altLang="zh-CN"/>
+              <a:t>barplot </a:t>
+            </a:r>
+            <a:r>
+              <a:rPr lang="zh-CN" altLang="en-US"/>
+              <a:t>展示和对比方法在</a:t>
+            </a:r>
+            <a:r>
+              <a:rPr lang="en-US" altLang="zh-CN"/>
+              <a:t>NMI </a:t>
+            </a:r>
+            <a:r>
+              <a:rPr lang="zh-CN" altLang="en-US"/>
+              <a:t>和</a:t>
+            </a:r>
+            <a:r>
+              <a:rPr lang="en-US" altLang="zh-CN"/>
+              <a:t> ARI </a:t>
+            </a:r>
+            <a:r>
+              <a:rPr lang="zh-CN" altLang="en-US"/>
+              <a:t>上的</a:t>
+            </a:r>
+            <a:r>
+              <a:rPr lang="zh-CN" altLang="en-US"/>
+              <a:t>表现</a:t>
+            </a:r>
+            <a:endParaRPr lang="zh-CN" altLang="en-US"/>
+          </a:p>
+          <a:p>
+            <a:pPr lvl="1"/>
+            <a:r>
+              <a:rPr lang="zh-CN" altLang="en-US">
+                <a:solidFill>
+                  <a:srgbClr val="FF0000"/>
+                </a:solidFill>
+              </a:rPr>
+              <a:t>结合具体的</a:t>
+            </a:r>
+            <a:r>
+              <a:rPr lang="en-US" altLang="zh-CN">
+                <a:solidFill>
+                  <a:srgbClr val="FF0000"/>
+                </a:solidFill>
+              </a:rPr>
+              <a:t>UMAP</a:t>
+            </a:r>
+            <a:r>
+              <a:rPr lang="zh-CN" altLang="en-US">
+                <a:solidFill>
+                  <a:srgbClr val="FF0000"/>
+                </a:solidFill>
+              </a:rPr>
+              <a:t>说明在真实生物学信号上表现</a:t>
+            </a:r>
+            <a:endParaRPr lang="zh-CN" altLang="en-US">
+              <a:solidFill>
+                <a:srgbClr val="FF0000"/>
+              </a:solidFill>
+            </a:endParaRPr>
+          </a:p>
+          <a:p>
+            <a:pPr lvl="0"/>
+            <a:r>
+              <a:rPr lang="en-US" altLang="zh-CN"/>
+              <a:t>c. </a:t>
+            </a:r>
+            <a:r>
+              <a:rPr lang="zh-CN" altLang="en-US"/>
+              <a:t>展示</a:t>
+            </a:r>
+            <a:r>
+              <a:rPr lang="en-US" altLang="zh-CN"/>
+              <a:t>SR </a:t>
+            </a:r>
+            <a:r>
+              <a:rPr lang="zh-CN" altLang="en-US"/>
+              <a:t>消融，说明</a:t>
+            </a:r>
+            <a:r>
+              <a:rPr lang="en-US" altLang="zh-CN"/>
+              <a:t>loss </a:t>
+            </a:r>
+            <a:r>
+              <a:rPr lang="zh-CN" altLang="en-US"/>
+              <a:t>设计作用</a:t>
+            </a:r>
+            <a:r>
+              <a:rPr lang="en-US" altLang="zh-CN"/>
+              <a:t> </a:t>
+            </a:r>
+            <a:endParaRPr lang="en-US" altLang="zh-CN"/>
+          </a:p>
+          <a:p>
+            <a:pPr lvl="1"/>
+            <a:r>
+              <a:rPr lang="en-US" altLang="zh-CN"/>
+              <a:t>barplot </a:t>
+            </a:r>
+            <a:r>
+              <a:rPr lang="zh-CN" altLang="en-US"/>
+              <a:t>展示具体</a:t>
+            </a:r>
+            <a:r>
+              <a:rPr lang="zh-CN" altLang="en-US"/>
+              <a:t>指标</a:t>
+            </a:r>
+            <a:endParaRPr lang="zh-CN" altLang="en-US"/>
+          </a:p>
+          <a:p>
+            <a:pPr lvl="1"/>
+            <a:r>
+              <a:rPr lang="zh-CN" altLang="en-US">
+                <a:solidFill>
+                  <a:srgbClr val="FF0000"/>
+                </a:solidFill>
+              </a:rPr>
+              <a:t>考虑一个具体的</a:t>
+            </a:r>
+            <a:r>
+              <a:rPr lang="en-US" altLang="zh-CN">
+                <a:solidFill>
+                  <a:srgbClr val="FF0000"/>
+                </a:solidFill>
+              </a:rPr>
+              <a:t>case </a:t>
+            </a:r>
+            <a:r>
+              <a:rPr lang="zh-CN" altLang="en-US">
+                <a:solidFill>
+                  <a:srgbClr val="FF0000"/>
+                </a:solidFill>
+              </a:rPr>
+              <a:t>来说明设计的作用，可以是模拟数据</a:t>
+            </a:r>
+            <a:endParaRPr lang="zh-CN" altLang="en-US">
+              <a:solidFill>
+                <a:srgbClr val="FF0000"/>
+              </a:solidFill>
+            </a:endParaRPr>
           </a:p>
         </p:txBody>
       </p:sp>
@@ -4058,6 +4551,209 @@
 </file>
 
 <file path=ppt/slides/slide5.xml><?xml version="1.0" encoding="utf-8"?>
+<p:sld xmlns:a="http://schemas.openxmlformats.org/drawingml/2006/main" xmlns:r="http://schemas.openxmlformats.org/officeDocument/2006/relationships" xmlns:p="http://schemas.openxmlformats.org/presentationml/2006/main">
+  <p:cSld>
+    <p:spTree>
+      <p:nvGrpSpPr>
+        <p:cNvPr id="1" name=""/>
+        <p:cNvGrpSpPr/>
+        <p:nvPr/>
+      </p:nvGrpSpPr>
+      <p:grpSpPr/>
+      <p:sp>
+        <p:nvSpPr>
+          <p:cNvPr id="2" name="Title 1"/>
+          <p:cNvSpPr>
+            <a:spLocks noGrp="1"/>
+          </p:cNvSpPr>
+          <p:nvPr>
+            <p:ph type="title"/>
+          </p:nvPr>
+        </p:nvSpPr>
+        <p:spPr/>
+        <p:txBody>
+          <a:bodyPr/>
+          <a:p>
+            <a:endParaRPr lang="en-US"/>
+          </a:p>
+        </p:txBody>
+      </p:sp>
+      <p:pic>
+        <p:nvPicPr>
+          <p:cNvPr id="4" name="Content Placeholder 3"/>
+          <p:cNvPicPr>
+            <a:picLocks noChangeAspect="1"/>
+          </p:cNvPicPr>
+          <p:nvPr>
+            <p:ph idx="1"/>
+          </p:nvPr>
+        </p:nvPicPr>
+        <p:blipFill>
+          <a:blip r:embed="rId1"/>
+          <a:stretch>
+            <a:fillRect/>
+          </a:stretch>
+        </p:blipFill>
+        <p:spPr>
+          <a:xfrm>
+            <a:off x="0" y="0"/>
+            <a:ext cx="6830695" cy="3557270"/>
+          </a:xfrm>
+          <a:prstGeom prst="rect">
+            <a:avLst/>
+          </a:prstGeom>
+        </p:spPr>
+      </p:pic>
+      <p:pic>
+        <p:nvPicPr>
+          <p:cNvPr id="5" name="Picture 4"/>
+          <p:cNvPicPr>
+            <a:picLocks noChangeAspect="1"/>
+          </p:cNvPicPr>
+          <p:nvPr/>
+        </p:nvPicPr>
+        <p:blipFill>
+          <a:blip r:embed="rId2"/>
+          <a:stretch>
+            <a:fillRect/>
+          </a:stretch>
+        </p:blipFill>
+        <p:spPr>
+          <a:xfrm>
+            <a:off x="23495" y="3313430"/>
+            <a:ext cx="6807200" cy="3544570"/>
+          </a:xfrm>
+          <a:prstGeom prst="rect">
+            <a:avLst/>
+          </a:prstGeom>
+        </p:spPr>
+      </p:pic>
+      <p:pic>
+        <p:nvPicPr>
+          <p:cNvPr id="6" name="Picture 5"/>
+          <p:cNvPicPr>
+            <a:picLocks noChangeAspect="1"/>
+          </p:cNvPicPr>
+          <p:nvPr/>
+        </p:nvPicPr>
+        <p:blipFill>
+          <a:blip r:embed="rId3"/>
+          <a:stretch>
+            <a:fillRect/>
+          </a:stretch>
+        </p:blipFill>
+        <p:spPr>
+          <a:xfrm>
+            <a:off x="6651625" y="147320"/>
+            <a:ext cx="5243195" cy="1695450"/>
+          </a:xfrm>
+          <a:prstGeom prst="rect">
+            <a:avLst/>
+          </a:prstGeom>
+        </p:spPr>
+      </p:pic>
+      <p:pic>
+        <p:nvPicPr>
+          <p:cNvPr id="7" name="Picture 6"/>
+          <p:cNvPicPr>
+            <a:picLocks noChangeAspect="1"/>
+          </p:cNvPicPr>
+          <p:nvPr/>
+        </p:nvPicPr>
+        <p:blipFill>
+          <a:blip r:embed="rId4"/>
+          <a:stretch>
+            <a:fillRect/>
+          </a:stretch>
+        </p:blipFill>
+        <p:spPr>
+          <a:xfrm>
+            <a:off x="6651625" y="1862455"/>
+            <a:ext cx="5242560" cy="1694815"/>
+          </a:xfrm>
+          <a:prstGeom prst="rect">
+            <a:avLst/>
+          </a:prstGeom>
+        </p:spPr>
+      </p:pic>
+      <p:sp>
+        <p:nvSpPr>
+          <p:cNvPr id="8" name="Text Box 7"/>
+          <p:cNvSpPr txBox="1"/>
+          <p:nvPr/>
+        </p:nvSpPr>
+        <p:spPr>
+          <a:xfrm>
+            <a:off x="7098030" y="3905250"/>
+            <a:ext cx="4229100" cy="922020"/>
+          </a:xfrm>
+          <a:prstGeom prst="rect">
+            <a:avLst/>
+          </a:prstGeom>
+          <a:noFill/>
+        </p:spPr>
+        <p:txBody>
+          <a:bodyPr wrap="square" rtlCol="0">
+            <a:spAutoFit/>
+          </a:bodyPr>
+          <a:p>
+            <a:r>
+              <a:rPr lang="en-US"/>
+              <a:t>OSBPL10 </a:t>
+            </a:r>
+            <a:r>
+              <a:rPr lang="zh-CN" altLang="en-US"/>
+              <a:t>这个</a:t>
+            </a:r>
+            <a:r>
+              <a:rPr lang="en-US" altLang="zh-CN"/>
+              <a:t>gene </a:t>
+            </a:r>
+            <a:r>
+              <a:rPr lang="zh-CN" altLang="en-US"/>
+              <a:t>在生成的数据中</a:t>
+            </a:r>
+            <a:r>
+              <a:rPr lang="en-US" altLang="zh-CN"/>
+              <a:t> pre B </a:t>
+            </a:r>
+            <a:r>
+              <a:rPr lang="zh-CN" altLang="en-US"/>
+              <a:t>和</a:t>
+            </a:r>
+            <a:r>
+              <a:rPr lang="en-US" altLang="zh-CN"/>
+              <a:t> B cell progenitor </a:t>
+            </a:r>
+            <a:r>
+              <a:rPr lang="zh-CN" altLang="en-US"/>
+              <a:t>有明显的强度差异，单子啊</a:t>
+            </a:r>
+            <a:r>
+              <a:rPr lang="en-US" altLang="zh-CN"/>
+              <a:t>ori</a:t>
+            </a:r>
+            <a:r>
+              <a:rPr lang="zh-CN" altLang="en-US"/>
+              <a:t>数据中无法</a:t>
+            </a:r>
+            <a:r>
+              <a:rPr lang="zh-CN" altLang="en-US"/>
+              <a:t>体现</a:t>
+            </a:r>
+            <a:endParaRPr lang="zh-CN" altLang="en-US"/>
+          </a:p>
+        </p:txBody>
+      </p:sp>
+    </p:spTree>
+  </p:cSld>
+  <p:clrMapOvr>
+    <a:masterClrMapping/>
+  </p:clrMapOvr>
+</p:sld>
+</file>
+
+<file path=ppt/slides/slide6.xml><?xml version="1.0" encoding="utf-8"?>
 <p:sld xmlns:a="http://schemas.openxmlformats.org/drawingml/2006/main" xmlns:r="http://schemas.openxmlformats.org/officeDocument/2006/relationships" xmlns:p="http://schemas.openxmlformats.org/presentationml/2006/main">
   <p:cSld>
     <p:spTree>
@@ -4451,7 +5147,7 @@
 </p:sld>
 </file>
 
-<file path=ppt/slides/slide6.xml><?xml version="1.0" encoding="utf-8"?>
+<file path=ppt/slides/slide7.xml><?xml version="1.0" encoding="utf-8"?>
 <p:sld xmlns:a="http://schemas.openxmlformats.org/drawingml/2006/main" xmlns:r="http://schemas.openxmlformats.org/officeDocument/2006/relationships" xmlns:p="http://schemas.openxmlformats.org/presentationml/2006/main">
   <p:cSld>
     <p:spTree>
@@ -4530,24 +5226,6 @@
 </p:sld>
 </file>
 
-<file path=ppt/slides/slide7.xml><?xml version="1.0" encoding="utf-8"?>
-<p:sld xmlns:a="http://schemas.openxmlformats.org/drawingml/2006/main" xmlns:r="http://schemas.openxmlformats.org/officeDocument/2006/relationships" xmlns:p="http://schemas.openxmlformats.org/presentationml/2006/main">
-  <p:cSld>
-    <p:spTree>
-      <p:nvGrpSpPr>
-        <p:cNvPr id="1" name=""/>
-        <p:cNvGrpSpPr/>
-        <p:nvPr/>
-      </p:nvGrpSpPr>
-      <p:grpSpPr/>
-    </p:spTree>
-  </p:cSld>
-  <p:clrMapOvr>
-    <a:masterClrMapping/>
-  </p:clrMapOvr>
-</p:sld>
-</file>
-
 <file path=ppt/slides/slide8.xml><?xml version="1.0" encoding="utf-8"?>
 <p:sld xmlns:a="http://schemas.openxmlformats.org/drawingml/2006/main" xmlns:r="http://schemas.openxmlformats.org/officeDocument/2006/relationships" xmlns:p="http://schemas.openxmlformats.org/presentationml/2006/main">
   <p:cSld>
@@ -4558,9 +5236,270 @@
         <p:nvPr/>
       </p:nvGrpSpPr>
       <p:grpSpPr/>
+      <p:sp>
+        <p:nvSpPr>
+          <p:cNvPr id="2" name="Title 1"/>
+          <p:cNvSpPr>
+            <a:spLocks noGrp="1"/>
+          </p:cNvSpPr>
+          <p:nvPr>
+            <p:ph type="title"/>
+          </p:nvPr>
+        </p:nvSpPr>
+        <p:spPr/>
+        <p:txBody>
+          <a:bodyPr/>
+          <a:p>
+            <a:r>
+              <a:rPr lang="en-US"/>
+              <a:t>F</a:t>
+            </a:r>
+            <a:r>
+              <a:rPr lang="en-US"/>
+              <a:t>igure 4: GRN inference</a:t>
+            </a:r>
+            <a:endParaRPr lang="en-US"/>
+          </a:p>
+        </p:txBody>
+      </p:sp>
+      <p:sp>
+        <p:nvSpPr>
+          <p:cNvPr id="3" name="Content Placeholder 2"/>
+          <p:cNvSpPr>
+            <a:spLocks noGrp="1"/>
+          </p:cNvSpPr>
+          <p:nvPr>
+            <p:ph idx="1"/>
+          </p:nvPr>
+        </p:nvSpPr>
+        <p:spPr/>
+        <p:txBody>
+          <a:bodyPr/>
+          <a:p>
+            <a:endParaRPr lang="en-US"/>
+          </a:p>
+        </p:txBody>
+      </p:sp>
+    </p:spTree>
+  </p:cSld>
+  <p:clrMapOvr>
+    <a:masterClrMapping/>
+  </p:clrMapOvr>
+</p:sld>
+</file>
+
+<file path=ppt/slides/slide9.xml><?xml version="1.0" encoding="utf-8"?>
+<p:sld xmlns:a="http://schemas.openxmlformats.org/drawingml/2006/main" xmlns:r="http://schemas.openxmlformats.org/officeDocument/2006/relationships" xmlns:p="http://schemas.openxmlformats.org/presentationml/2006/main">
+  <p:cSld>
+    <p:spTree>
+      <p:nvGrpSpPr>
+        <p:cNvPr id="1" name=""/>
+        <p:cNvGrpSpPr/>
+        <p:nvPr/>
+      </p:nvGrpSpPr>
+      <p:grpSpPr/>
+      <p:sp>
+        <p:nvSpPr>
+          <p:cNvPr id="2" name="Title 1"/>
+          <p:cNvSpPr>
+            <a:spLocks noGrp="1"/>
+          </p:cNvSpPr>
+          <p:nvPr>
+            <p:ph type="title"/>
+          </p:nvPr>
+        </p:nvSpPr>
+        <p:spPr/>
+        <p:txBody>
+          <a:bodyPr/>
+          <a:p>
+            <a:r>
+              <a:rPr lang="en-US"/>
+              <a:t>Figure 5</a:t>
+            </a:r>
+            <a:r>
+              <a:rPr lang="zh-CN" altLang="en-US"/>
+              <a:t>：</a:t>
+            </a:r>
+            <a:r>
+              <a:rPr lang="en-US" altLang="zh-CN"/>
+              <a:t>atlas </a:t>
+            </a:r>
+            <a:r>
+              <a:rPr lang="zh-CN" altLang="en-US"/>
+              <a:t>数据增强和</a:t>
+            </a:r>
+            <a:r>
+              <a:rPr lang="en-US" altLang="zh-CN"/>
+              <a:t> </a:t>
+            </a:r>
+            <a:r>
+              <a:rPr lang="zh-CN" altLang="en-US"/>
+              <a:t>数据库</a:t>
+            </a:r>
+            <a:r>
+              <a:rPr lang="zh-CN" altLang="en-US"/>
+              <a:t>构建</a:t>
+            </a:r>
+            <a:endParaRPr lang="zh-CN" altLang="en-US"/>
+          </a:p>
+        </p:txBody>
+      </p:sp>
+      <p:sp>
+        <p:nvSpPr>
+          <p:cNvPr id="3" name="Content Placeholder 2"/>
+          <p:cNvSpPr>
+            <a:spLocks noGrp="1"/>
+          </p:cNvSpPr>
+          <p:nvPr>
+            <p:ph idx="1"/>
+          </p:nvPr>
+        </p:nvSpPr>
+        <p:spPr/>
+        <p:txBody>
+          <a:bodyPr/>
+          <a:p>
+            <a:r>
+              <a:rPr lang="en-US" sz="1600"/>
+              <a:t>a. </a:t>
+            </a:r>
+            <a:r>
+              <a:rPr lang="zh-CN" altLang="en-US" sz="1600"/>
+              <a:t>示意图：</a:t>
+            </a:r>
+            <a:r>
+              <a:rPr lang="en-US" altLang="zh-CN" sz="1600"/>
+              <a:t> atlas </a:t>
+            </a:r>
+            <a:r>
+              <a:rPr lang="zh-CN" altLang="en-US" sz="1600"/>
+              <a:t>数据增强训练策略及匹配数据构建流程</a:t>
+            </a:r>
+            <a:endParaRPr lang="zh-CN" altLang="en-US" sz="1600"/>
+          </a:p>
+          <a:p>
+            <a:r>
+              <a:rPr lang="en-US" altLang="zh-CN" sz="1600"/>
+              <a:t>b. </a:t>
+            </a:r>
+            <a:r>
+              <a:rPr lang="zh-CN" altLang="en-US" sz="1600"/>
+              <a:t>增强训练评估：</a:t>
+            </a:r>
+            <a:endParaRPr lang="zh-CN" altLang="en-US" sz="1600"/>
+          </a:p>
+          <a:p>
+            <a:pPr lvl="1"/>
+            <a:r>
+              <a:rPr lang="zh-CN" altLang="en-US" sz="1600"/>
+              <a:t>在独立</a:t>
+            </a:r>
+            <a:r>
+              <a:rPr lang="en-US" altLang="zh-CN" sz="1600"/>
+              <a:t>10x</a:t>
+            </a:r>
+            <a:r>
+              <a:rPr lang="zh-CN" altLang="en-US" sz="1600"/>
+              <a:t>多组学上验证指标提升</a:t>
+            </a:r>
+            <a:endParaRPr lang="zh-CN" altLang="en-US" sz="1600"/>
+          </a:p>
+          <a:p>
+            <a:pPr lvl="0"/>
+            <a:r>
+              <a:rPr lang="en-US" altLang="zh-CN" sz="1600"/>
+              <a:t>c. </a:t>
+            </a:r>
+            <a:r>
+              <a:rPr lang="zh-CN" altLang="en-US" sz="1600"/>
+              <a:t>基于预训练</a:t>
+            </a:r>
+            <a:r>
+              <a:rPr lang="en-US" altLang="zh-CN" sz="1600"/>
+              <a:t>SR</a:t>
+            </a:r>
+            <a:r>
+              <a:rPr lang="zh-CN" altLang="en-US" sz="1600"/>
+              <a:t>获取</a:t>
+            </a:r>
+            <a:r>
+              <a:rPr lang="en-US" altLang="zh-CN" sz="1600"/>
+              <a:t>atlas cell embedding </a:t>
+            </a:r>
+            <a:r>
+              <a:rPr lang="zh-CN" altLang="en-US" sz="1600"/>
+              <a:t>并</a:t>
+            </a:r>
+            <a:r>
+              <a:rPr lang="zh-CN" altLang="en-US" sz="1600"/>
+              <a:t>对齐</a:t>
+            </a:r>
+            <a:endParaRPr lang="zh-CN" altLang="en-US" sz="1600"/>
+          </a:p>
+          <a:p>
+            <a:pPr lvl="1"/>
+            <a:r>
+              <a:rPr lang="en-US" altLang="zh-CN" sz="1370"/>
+              <a:t>UMAP</a:t>
+            </a:r>
+            <a:r>
+              <a:rPr lang="zh-CN" altLang="en-US" sz="1370"/>
+              <a:t>展示对齐</a:t>
+            </a:r>
+            <a:r>
+              <a:rPr lang="zh-CN" altLang="en-US" sz="1370"/>
+              <a:t>效果</a:t>
+            </a:r>
+            <a:endParaRPr lang="zh-CN" altLang="en-US" sz="1370"/>
+          </a:p>
+          <a:p>
+            <a:pPr lvl="1"/>
+            <a:r>
+              <a:rPr lang="zh-CN" altLang="en-US" sz="1370"/>
+              <a:t>展示细胞类型对齐</a:t>
+            </a:r>
+            <a:r>
+              <a:rPr lang="zh-CN" altLang="en-US" sz="1370"/>
+              <a:t>一致性</a:t>
+            </a:r>
+            <a:endParaRPr lang="zh-CN" altLang="en-US" sz="1370"/>
+          </a:p>
+          <a:p>
+            <a:pPr lvl="0"/>
+            <a:r>
+              <a:rPr lang="en-US" altLang="zh-CN" sz="1595"/>
+              <a:t>d. </a:t>
+            </a:r>
+            <a:r>
+              <a:rPr lang="zh-CN" altLang="en-US" sz="1595"/>
+              <a:t>展示具体的生物学</a:t>
+            </a:r>
+            <a:r>
+              <a:rPr lang="zh-CN" altLang="en-US" sz="1595"/>
+              <a:t>应用：</a:t>
+            </a:r>
+            <a:endParaRPr lang="zh-CN" altLang="en-US" sz="1595"/>
+          </a:p>
+          <a:p>
+            <a:pPr lvl="1"/>
+            <a:r>
+              <a:rPr lang="en-US" altLang="zh-CN" sz="1365"/>
+              <a:t>eg. </a:t>
+            </a:r>
+            <a:r>
+              <a:rPr lang="zh-CN" altLang="en-US" sz="1365"/>
+              <a:t>基于对齐数据构建某个细胞类型的</a:t>
+            </a:r>
+            <a:r>
+              <a:rPr lang="en-US" altLang="zh-CN" sz="1365"/>
+              <a:t>GRN</a:t>
+            </a:r>
+            <a:endParaRPr lang="en-US" altLang="zh-CN" sz="1365"/>
+          </a:p>
+        </p:txBody>
+      </p:sp>
       <p:pic>
         <p:nvPicPr>
-          <p:cNvPr id="4" name="Picture 3"/>
+          <p:cNvPr id="5" name="Picture 4"/>
           <p:cNvPicPr>
             <a:picLocks noChangeAspect="1"/>
           </p:cNvPicPr>
@@ -4574,69 +5513,8 @@
         </p:blipFill>
         <p:spPr>
           <a:xfrm>
-            <a:off x="68580" y="3819525"/>
-            <a:ext cx="9934575" cy="2850515"/>
-          </a:xfrm>
-          <a:prstGeom prst="rect">
-            <a:avLst/>
-          </a:prstGeom>
-        </p:spPr>
-      </p:pic>
-      <p:sp>
-        <p:nvSpPr>
-          <p:cNvPr id="5" name="Text Box 4"/>
-          <p:cNvSpPr txBox="1"/>
-          <p:nvPr/>
-        </p:nvSpPr>
-        <p:spPr>
-          <a:xfrm>
-            <a:off x="607695" y="454025"/>
-            <a:ext cx="4279900" cy="368300"/>
-          </a:xfrm>
-          <a:prstGeom prst="rect">
-            <a:avLst/>
-          </a:prstGeom>
-          <a:noFill/>
-        </p:spPr>
-        <p:txBody>
-          <a:bodyPr wrap="square" rtlCol="0">
-            <a:spAutoFit/>
-          </a:bodyPr>
-          <a:p>
-            <a:r>
-              <a:rPr lang="en-US"/>
-              <a:t>BMMC </a:t>
-            </a:r>
-            <a:r>
-              <a:rPr lang="zh-CN" altLang="en-US"/>
-              <a:t>数据</a:t>
-            </a:r>
-            <a:r>
-              <a:rPr lang="zh-CN" altLang="en-US"/>
-              <a:t>展示</a:t>
-            </a:r>
-            <a:endParaRPr lang="zh-CN" altLang="en-US"/>
-          </a:p>
-        </p:txBody>
-      </p:sp>
-      <p:pic>
-        <p:nvPicPr>
-          <p:cNvPr id="6" name="Picture 5"/>
-          <p:cNvPicPr>
-            <a:picLocks noChangeAspect="1"/>
-          </p:cNvPicPr>
-          <p:nvPr/>
-        </p:nvPicPr>
-        <p:blipFill>
-          <a:blip r:embed="rId2"/>
-          <a:stretch>
-            <a:fillRect/>
-          </a:stretch>
-        </p:blipFill>
-        <p:spPr>
-          <a:xfrm>
-            <a:off x="8164195" y="0"/>
-            <a:ext cx="3961130" cy="3308350"/>
+            <a:off x="6631305" y="1691005"/>
+            <a:ext cx="5560695" cy="2499995"/>
           </a:xfrm>
           <a:prstGeom prst="rect">
             <a:avLst/>
